--- a/jumpstart-kits/js0-setup/presentation/JS0_Presentation.pptx
+++ b/jumpstart-kits/js0-setup/presentation/JS0_Presentation.pptx
@@ -770,7 +770,7 @@
           <a:p>
             <a:r>
               <a:rPr lang="en-US" dirty="0"/>
-              <a:t>Two-stage validation — quick confidence, then a real design. Hand off to the design-as-code capstone on the next slide. Card 2 is 4.2.x-only for now; on 4.3+ it's skipped and the capstone runs on the template.</a:t>
+              <a:t>Two-stage validation — quick confidence, then a real design. Hand off to the design-as-code capstone on the next slide.</a:t>
             </a:r>
             <a:endParaRPr lang="en-US" dirty="0"/>
           </a:p>
@@ -1233,7 +1233,7 @@
       </p:grpSpPr>
       <p:pic>
         <p:nvPicPr>
-          <p:cNvPr id="2" name="Image 0" descr="/Users/bgupta/conductor/workspaces/py-components/zurich/internal/deck-tooling/assets/jitx_logo.png">    </p:cNvPr>
+          <p:cNvPr id="2" name="Image 0" descr="/Users/bgupta/conductor/workspaces/py-components/carthage/internal/deck-tooling/assets/jitx_logo.png">    </p:cNvPr>
           <p:cNvPicPr>
             <a:picLocks noChangeAspect="1"/>
           </p:cNvPicPr>
@@ -1684,7 +1684,7 @@
       </p:grpSpPr>
       <p:pic>
         <p:nvPicPr>
-          <p:cNvPr id="2" name="Image 0" descr="/Users/bgupta/conductor/workspaces/py-components/zurich/internal/deck-tooling/assets/jitx_logo.png">    </p:cNvPr>
+          <p:cNvPr id="2" name="Image 0" descr="/Users/bgupta/conductor/workspaces/py-components/carthage/internal/deck-tooling/assets/jitx_logo.png">    </p:cNvPr>
           <p:cNvPicPr>
             <a:picLocks noChangeAspect="1"/>
           </p:cNvPicPr>
@@ -2769,7 +2769,7 @@
       </p:grpSpPr>
       <p:pic>
         <p:nvPicPr>
-          <p:cNvPr id="2" name="Image 0" descr="/Users/bgupta/conductor/workspaces/py-components/zurich/internal/deck-tooling/assets/jitx_logo.png">    </p:cNvPr>
+          <p:cNvPr id="2" name="Image 0" descr="/Users/bgupta/conductor/workspaces/py-components/carthage/internal/deck-tooling/assets/jitx_logo.png">    </p:cNvPr>
           <p:cNvPicPr>
             <a:picLocks noChangeAspect="1"/>
           </p:cNvPicPr>
@@ -3644,7 +3644,7 @@
       </p:grpSpPr>
       <p:pic>
         <p:nvPicPr>
-          <p:cNvPr id="2" name="Image 0" descr="/Users/bgupta/conductor/workspaces/py-components/zurich/internal/deck-tooling/assets/jitx_logo.png">    </p:cNvPr>
+          <p:cNvPr id="2" name="Image 0" descr="/Users/bgupta/conductor/workspaces/py-components/carthage/internal/deck-tooling/assets/jitx_logo.png">    </p:cNvPr>
           <p:cNvPicPr>
             <a:picLocks noChangeAspect="1"/>
           </p:cNvPicPr>
@@ -4000,7 +4000,7 @@
                 <a:ea typeface="Arial" pitchFamily="34" charset="-122"/>
                 <a:cs typeface="Arial" pitchFamily="34" charset="-120"/>
               </a:rPr>
-              <a:t>2  ·  Full (JITX 4.2.x)</a:t>
+              <a:t>2  ·  Full</a:t>
             </a:r>
             <a:endParaRPr lang="en-US" sz="2000" dirty="0"/>
           </a:p>
@@ -4042,7 +4042,7 @@
                 <a:ea typeface="Arial" pitchFamily="34" charset="-122"/>
                 <a:cs typeface="Arial" pitchFamily="34" charset="-120"/>
               </a:rPr>
-              <a:t>Build si_bga_optimization from jitx-examples — the real toolchain exercise. Skipped on 4.3+.</a:t>
+              <a:t>Build si_bga_optimization from jitx-examples — the real toolchain exercise.</a:t>
             </a:r>
             <a:endParaRPr lang="en-US" sz="1500" dirty="0"/>
           </a:p>
@@ -4251,7 +4251,7 @@
       </p:grpSpPr>
       <p:pic>
         <p:nvPicPr>
-          <p:cNvPr id="2" name="Image 0" descr="/Users/bgupta/conductor/workspaces/py-components/zurich/internal/deck-tooling/assets/jitx_logo.png">    </p:cNvPr>
+          <p:cNvPr id="2" name="Image 0" descr="/Users/bgupta/conductor/workspaces/py-components/carthage/internal/deck-tooling/assets/jitx_logo.png">    </p:cNvPr>
           <p:cNvPicPr>
             <a:picLocks noChangeAspect="1"/>
           </p:cNvPicPr>
